--- a/public/fun/pack/pptx/birthdaypro/돌잔치프리미엄_40_첫번째이야기중심_모노블랙.pptx
+++ b/public/fun/pack/pptx/birthdaypro/돌잔치프리미엄_40_첫번째이야기중심_모노블랙.pptx
@@ -112,12 +112,12 @@
   <p:extLst>
     <p:ext uri="{521415D9-36F7-43E2-AB2F-B90AF26B5E84}">
       <p14:sectionLst xmlns:p14="http://schemas.microsoft.com/office/powerpoint/2010/main">
-        <p14:section name="시작" id="{F0F45724-D815-42D9-9020-4ED653CBAE8A}">
+        <p14:section name="시작" id="{470D8366-01DC-4FFA-9291-B21E07CC33E6}">
           <p14:sldIdLst>
             <p14:sldId id="256"/>
           </p14:sldIdLst>
         </p14:section>
-        <p14:section name="본문" id="{51ACEBD5-4E92-4755-9EA5-51D9806FB1E9}">
+        <p14:section name="본문" id="{098D0348-D19D-4C3D-BB9B-84C63124F862}">
           <p14:sldIdLst>
             <p14:sldId id="257"/>
             <p14:sldId id="258"/>
@@ -125,7 +125,7 @@
             <p14:sldId id="260"/>
           </p14:sldIdLst>
         </p14:section>
-        <p14:section name="마무리" id="{844619D2-2986-4470-A2D3-3EE55EF9FF3A}">
+        <p14:section name="마무리" id="{6FDBB103-CBEF-425D-BE6D-C201A3E929DE}">
           <p14:sldIdLst>
             <p14:sldId id="261"/>
           </p14:sldIdLst>
@@ -1315,7 +1315,7 @@
             </a:lvl1pPr>
           </a:lstStyle>
           <a:p>
-            <a:fld id="{8291DCCF-B6D0-4665-9997-20EE1656FD4A}" type="slidenum">
+            <a:fld id="{46683FA0-BDFB-46A5-87C8-414D445F545E}" type="slidenum">
               <a:rPr lang="en-US"/>
               <a:t>‹#›</a:t>
             </a:fld>
@@ -1902,7 +1902,7 @@
             </a:lvl1pPr>
           </a:lstStyle>
           <a:p>
-            <a:fld id="{DEF3E21A-C201-44E6-BC98-029D159FD6AC}" type="slidenum">
+            <a:fld id="{4D174F8B-D64C-4438-9FB4-A50AEB2BC412}" type="slidenum">
               <a:rPr lang="en-US"/>
               <a:t>‹#›</a:t>
             </a:fld>
@@ -2590,7 +2590,7 @@
             </a:lvl1pPr>
           </a:lstStyle>
           <a:p>
-            <a:fld id="{5AE8B586-D700-4897-A49F-1EF76CC2B734}" type="slidenum">
+            <a:fld id="{2F8E6A87-8A46-4188-B534-CF7ABA7138AC}" type="slidenum">
               <a:rPr lang="en-US"/>
               <a:t>‹#›</a:t>
             </a:fld>
@@ -3501,7 +3501,7 @@
           <a:p>
             <a:r>
               <a:rPr lang="ko-KR"/>
-              <a:t>아기 이름 · 0000. 00. 00</a:t>
+              <a:t>아기 이름 · 날짜 입력</a:t>
             </a:r>
           </a:p>
           <a:p>
@@ -3662,7 +3662,7 @@
           <a:bodyPr/>
           <a:lstStyle/>
           <a:p>
-            <a:fld id="{284DF7BC-9902-4B1D-8B6E-F28B19F72AD0}" type="slidenum">
+            <a:fld id="{EFE06F71-A198-4B1E-9ECE-F2183E6182AB}" type="slidenum">
               <a:rPr lang="en-US"/>
               <a:t>‹#›</a:t>
             </a:fld>
@@ -4262,7 +4262,7 @@
           <a:bodyPr/>
           <a:lstStyle/>
           <a:p>
-            <a:fld id="{F876DE8D-AD9F-4763-A40C-6B343CC8FDAF}" type="slidenum">
+            <a:fld id="{6D49BA6B-5DE0-4BC0-AFF3-37D10474C66B}" type="slidenum">
               <a:rPr lang="en-US"/>
               <a:t>‹#›</a:t>
             </a:fld>
@@ -5104,7 +5104,7 @@
           <a:bodyPr/>
           <a:lstStyle/>
           <a:p>
-            <a:fld id="{8CCD20BD-98EC-46CE-BD7C-AD9E44555B49}" type="slidenum">
+            <a:fld id="{E2B156E5-B8B8-4818-BD82-D473FD0B35B9}" type="slidenum">
               <a:rPr lang="en-US"/>
               <a:t>‹#›</a:t>
             </a:fld>
@@ -6810,7 +6810,7 @@
           <a:bodyPr/>
           <a:lstStyle/>
           <a:p>
-            <a:fld id="{23B264DD-2949-4EDC-AF22-1CE80706CEAA}" type="slidenum">
+            <a:fld id="{D40506C8-C4F4-44EF-B352-2F6B49583CF1}" type="slidenum">
               <a:rPr lang="en-US"/>
               <a:t>‹#›</a:t>
             </a:fld>
